--- a/CareerSpotlights/RobertHenschel.pptx
+++ b/CareerSpotlights/RobertHenschel.pptx
@@ -5,20 +5,19 @@
     <p:sldMasterId id="2147483648" r:id="rId1"/>
   </p:sldMasterIdLst>
   <p:notesMasterIdLst>
-    <p:notesMasterId r:id="rId13"/>
+    <p:notesMasterId r:id="rId12"/>
   </p:notesMasterIdLst>
   <p:sldIdLst>
     <p:sldId id="256" r:id="rId2"/>
-    <p:sldId id="289" r:id="rId3"/>
-    <p:sldId id="290" r:id="rId4"/>
-    <p:sldId id="291" r:id="rId5"/>
-    <p:sldId id="266" r:id="rId6"/>
-    <p:sldId id="296" r:id="rId7"/>
-    <p:sldId id="293" r:id="rId8"/>
-    <p:sldId id="260" r:id="rId9"/>
-    <p:sldId id="292" r:id="rId10"/>
-    <p:sldId id="295" r:id="rId11"/>
-    <p:sldId id="294" r:id="rId12"/>
+    <p:sldId id="290" r:id="rId3"/>
+    <p:sldId id="291" r:id="rId4"/>
+    <p:sldId id="266" r:id="rId5"/>
+    <p:sldId id="296" r:id="rId6"/>
+    <p:sldId id="293" r:id="rId7"/>
+    <p:sldId id="260" r:id="rId8"/>
+    <p:sldId id="292" r:id="rId9"/>
+    <p:sldId id="295" r:id="rId10"/>
+    <p:sldId id="294" r:id="rId11"/>
   </p:sldIdLst>
   <p:sldSz cx="12192000" cy="6858000"/>
   <p:notesSz cx="6858000" cy="9144000"/>
@@ -518,90 +517,6 @@
           <a:bodyPr/>
           <a:lstStyle/>
           <a:p>
-            <a:endParaRPr lang="en-US" dirty="0"/>
-          </a:p>
-        </p:txBody>
-      </p:sp>
-      <p:sp>
-        <p:nvSpPr>
-          <p:cNvPr id="4" name="Slide Number Placeholder 3"/>
-          <p:cNvSpPr>
-            <a:spLocks noGrp="1"/>
-          </p:cNvSpPr>
-          <p:nvPr>
-            <p:ph type="sldNum" sz="quarter" idx="10"/>
-          </p:nvPr>
-        </p:nvSpPr>
-        <p:spPr/>
-        <p:txBody>
-          <a:bodyPr/>
-          <a:lstStyle/>
-          <a:p>
-            <a:fld id="{06E7E6BE-52A2-7F4D-9C1A-77BE2120A1F0}" type="slidenum">
-              <a:rPr lang="en-US" smtClean="0"/>
-              <a:t>2</a:t>
-            </a:fld>
-            <a:endParaRPr lang="en-US"/>
-          </a:p>
-        </p:txBody>
-      </p:sp>
-    </p:spTree>
-    <p:extLst>
-      <p:ext uri="{BB962C8B-B14F-4D97-AF65-F5344CB8AC3E}">
-        <p14:creationId xmlns:p14="http://schemas.microsoft.com/office/powerpoint/2010/main" val="4147571927"/>
-      </p:ext>
-    </p:extLst>
-  </p:cSld>
-  <p:clrMapOvr>
-    <a:masterClrMapping/>
-  </p:clrMapOvr>
-</p:notes>
-</file>
-
-<file path=ppt/notesSlides/notesSlide2.xml><?xml version="1.0" encoding="utf-8"?>
-<p:notes xmlns:a="http://schemas.openxmlformats.org/drawingml/2006/main" xmlns:r="http://schemas.openxmlformats.org/officeDocument/2006/relationships" xmlns:p="http://schemas.openxmlformats.org/presentationml/2006/main">
-  <p:cSld>
-    <p:spTree>
-      <p:nvGrpSpPr>
-        <p:cNvPr id="1" name=""/>
-        <p:cNvGrpSpPr/>
-        <p:nvPr/>
-      </p:nvGrpSpPr>
-      <p:grpSpPr>
-        <a:xfrm>
-          <a:off x="0" y="0"/>
-          <a:ext cx="0" cy="0"/>
-          <a:chOff x="0" y="0"/>
-          <a:chExt cx="0" cy="0"/>
-        </a:xfrm>
-      </p:grpSpPr>
-      <p:sp>
-        <p:nvSpPr>
-          <p:cNvPr id="2" name="Slide Image Placeholder 1"/>
-          <p:cNvSpPr>
-            <a:spLocks noGrp="1" noRot="1" noChangeAspect="1"/>
-          </p:cNvSpPr>
-          <p:nvPr>
-            <p:ph type="sldImg"/>
-          </p:nvPr>
-        </p:nvSpPr>
-        <p:spPr/>
-      </p:sp>
-      <p:sp>
-        <p:nvSpPr>
-          <p:cNvPr id="3" name="Notes Placeholder 2"/>
-          <p:cNvSpPr>
-            <a:spLocks noGrp="1"/>
-          </p:cNvSpPr>
-          <p:nvPr>
-            <p:ph type="body" idx="1"/>
-          </p:nvPr>
-        </p:nvSpPr>
-        <p:spPr/>
-        <p:txBody>
-          <a:bodyPr/>
-          <a:lstStyle/>
-          <a:p>
             <a:endParaRPr lang="en-US" sz="1200" dirty="0">
               <a:latin typeface="Arial" panose="020B0604020202020204" pitchFamily="34" charset="0"/>
               <a:cs typeface="Arial" panose="020B0604020202020204" pitchFamily="34" charset="0"/>
@@ -626,7 +541,7 @@
           <a:p>
             <a:fld id="{06E7E6BE-52A2-7F4D-9C1A-77BE2120A1F0}" type="slidenum">
               <a:rPr lang="en-US" smtClean="0"/>
-              <a:t>3</a:t>
+              <a:t>2</a:t>
             </a:fld>
             <a:endParaRPr lang="en-US"/>
           </a:p>
@@ -645,7 +560,7 @@
 </p:notes>
 </file>
 
-<file path=ppt/notesSlides/notesSlide3.xml><?xml version="1.0" encoding="utf-8"?>
+<file path=ppt/notesSlides/notesSlide2.xml><?xml version="1.0" encoding="utf-8"?>
 <p:notes xmlns:a="http://schemas.openxmlformats.org/drawingml/2006/main" xmlns:r="http://schemas.openxmlformats.org/officeDocument/2006/relationships" xmlns:p="http://schemas.openxmlformats.org/presentationml/2006/main">
   <p:cSld>
     <p:spTree>
@@ -734,7 +649,7 @@
           <a:p>
             <a:fld id="{06E7E6BE-52A2-7F4D-9C1A-77BE2120A1F0}" type="slidenum">
               <a:rPr lang="en-US" smtClean="0"/>
-              <a:t>4</a:t>
+              <a:t>3</a:t>
             </a:fld>
             <a:endParaRPr lang="en-US"/>
           </a:p>
@@ -753,7 +668,7 @@
 </p:notes>
 </file>
 
-<file path=ppt/notesSlides/notesSlide4.xml><?xml version="1.0" encoding="utf-8"?>
+<file path=ppt/notesSlides/notesSlide3.xml><?xml version="1.0" encoding="utf-8"?>
 <p:notes xmlns:a="http://schemas.openxmlformats.org/drawingml/2006/main" xmlns:r="http://schemas.openxmlformats.org/officeDocument/2006/relationships" xmlns:p="http://schemas.openxmlformats.org/presentationml/2006/main">
   <p:cSld>
     <p:spTree>
@@ -818,7 +733,7 @@
           <a:p>
             <a:fld id="{06E7E6BE-52A2-7F4D-9C1A-77BE2120A1F0}" type="slidenum">
               <a:rPr lang="en-US" smtClean="0"/>
-              <a:t>5</a:t>
+              <a:t>4</a:t>
             </a:fld>
             <a:endParaRPr lang="en-US"/>
           </a:p>
@@ -837,7 +752,7 @@
 </p:notes>
 </file>
 
-<file path=ppt/notesSlides/notesSlide5.xml><?xml version="1.0" encoding="utf-8"?>
+<file path=ppt/notesSlides/notesSlide4.xml><?xml version="1.0" encoding="utf-8"?>
 <p:notes xmlns:a="http://schemas.openxmlformats.org/drawingml/2006/main" xmlns:r="http://schemas.openxmlformats.org/officeDocument/2006/relationships" xmlns:p="http://schemas.openxmlformats.org/presentationml/2006/main">
   <p:cSld>
     <p:spTree>
@@ -926,7 +841,7 @@
           <a:p>
             <a:fld id="{06E7E6BE-52A2-7F4D-9C1A-77BE2120A1F0}" type="slidenum">
               <a:rPr lang="en-US" smtClean="0"/>
-              <a:t>6</a:t>
+              <a:t>5</a:t>
             </a:fld>
             <a:endParaRPr lang="en-US"/>
           </a:p>
@@ -945,7 +860,7 @@
 </p:notes>
 </file>
 
-<file path=ppt/notesSlides/notesSlide6.xml><?xml version="1.0" encoding="utf-8"?>
+<file path=ppt/notesSlides/notesSlide5.xml><?xml version="1.0" encoding="utf-8"?>
 <p:notes xmlns:a="http://schemas.openxmlformats.org/drawingml/2006/main" xmlns:r="http://schemas.openxmlformats.org/officeDocument/2006/relationships" xmlns:p="http://schemas.openxmlformats.org/presentationml/2006/main">
   <p:cSld>
     <p:spTree>
@@ -1034,7 +949,7 @@
           <a:p>
             <a:fld id="{06E7E6BE-52A2-7F4D-9C1A-77BE2120A1F0}" type="slidenum">
               <a:rPr lang="en-US" smtClean="0"/>
-              <a:t>7</a:t>
+              <a:t>6</a:t>
             </a:fld>
             <a:endParaRPr lang="en-US"/>
           </a:p>
@@ -1053,7 +968,7 @@
 </p:notes>
 </file>
 
-<file path=ppt/notesSlides/notesSlide7.xml><?xml version="1.0" encoding="utf-8"?>
+<file path=ppt/notesSlides/notesSlide6.xml><?xml version="1.0" encoding="utf-8"?>
 <p:notes xmlns:a="http://schemas.openxmlformats.org/drawingml/2006/main" xmlns:r="http://schemas.openxmlformats.org/officeDocument/2006/relationships" xmlns:p="http://schemas.openxmlformats.org/presentationml/2006/main">
   <p:cSld>
     <p:spTree>
@@ -1142,7 +1057,7 @@
           <a:p>
             <a:fld id="{06E7E6BE-52A2-7F4D-9C1A-77BE2120A1F0}" type="slidenum">
               <a:rPr lang="en-US" smtClean="0"/>
-              <a:t>9</a:t>
+              <a:t>8</a:t>
             </a:fld>
             <a:endParaRPr lang="en-US"/>
           </a:p>
@@ -1161,7 +1076,7 @@
 </p:notes>
 </file>
 
-<file path=ppt/notesSlides/notesSlide8.xml><?xml version="1.0" encoding="utf-8"?>
+<file path=ppt/notesSlides/notesSlide7.xml><?xml version="1.0" encoding="utf-8"?>
 <p:notes xmlns:a="http://schemas.openxmlformats.org/drawingml/2006/main" xmlns:r="http://schemas.openxmlformats.org/officeDocument/2006/relationships" xmlns:p="http://schemas.openxmlformats.org/presentationml/2006/main">
   <p:cSld>
     <p:spTree>
@@ -1250,7 +1165,7 @@
           <a:p>
             <a:fld id="{06E7E6BE-52A2-7F4D-9C1A-77BE2120A1F0}" type="slidenum">
               <a:rPr lang="en-US" smtClean="0"/>
-              <a:t>10</a:t>
+              <a:t>9</a:t>
             </a:fld>
             <a:endParaRPr lang="en-US"/>
           </a:p>
@@ -1269,7 +1184,7 @@
 </p:notes>
 </file>
 
-<file path=ppt/notesSlides/notesSlide9.xml><?xml version="1.0" encoding="utf-8"?>
+<file path=ppt/notesSlides/notesSlide8.xml><?xml version="1.0" encoding="utf-8"?>
 <p:notes xmlns:a="http://schemas.openxmlformats.org/drawingml/2006/main" xmlns:r="http://schemas.openxmlformats.org/officeDocument/2006/relationships" xmlns:p="http://schemas.openxmlformats.org/presentationml/2006/main">
   <p:cSld>
     <p:spTree>
@@ -1358,7 +1273,7 @@
           <a:p>
             <a:fld id="{06E7E6BE-52A2-7F4D-9C1A-77BE2120A1F0}" type="slidenum">
               <a:rPr lang="en-US" smtClean="0"/>
-              <a:t>11</a:t>
+              <a:t>10</a:t>
             </a:fld>
             <a:endParaRPr lang="en-US"/>
           </a:p>
@@ -5251,154 +5166,6 @@
         <p:cNvPr id="1" name="">
           <a:extLst>
             <a:ext uri="{FF2B5EF4-FFF2-40B4-BE49-F238E27FC236}">
-              <a16:creationId xmlns:a16="http://schemas.microsoft.com/office/drawing/2014/main" id="{0FB80583-B17F-60EF-99CC-296C8448B765}"/>
-            </a:ext>
-          </a:extLst>
-        </p:cNvPr>
-        <p:cNvGrpSpPr/>
-        <p:nvPr/>
-      </p:nvGrpSpPr>
-      <p:grpSpPr>
-        <a:xfrm>
-          <a:off x="0" y="0"/>
-          <a:ext cx="0" cy="0"/>
-          <a:chOff x="0" y="0"/>
-          <a:chExt cx="0" cy="0"/>
-        </a:xfrm>
-      </p:grpSpPr>
-      <p:sp>
-        <p:nvSpPr>
-          <p:cNvPr id="3" name="Content Placeholder 2">
-            <a:extLst>
-              <a:ext uri="{FF2B5EF4-FFF2-40B4-BE49-F238E27FC236}">
-                <a16:creationId xmlns:a16="http://schemas.microsoft.com/office/drawing/2014/main" id="{91F68BB5-38F8-1B70-F687-A9A5CCAE13AB}"/>
-              </a:ext>
-            </a:extLst>
-          </p:cNvPr>
-          <p:cNvSpPr>
-            <a:spLocks noGrp="1"/>
-          </p:cNvSpPr>
-          <p:nvPr>
-            <p:ph idx="1"/>
-          </p:nvPr>
-        </p:nvSpPr>
-        <p:spPr>
-          <a:xfrm>
-            <a:off x="951872" y="1543883"/>
-            <a:ext cx="10842964" cy="4867934"/>
-          </a:xfrm>
-        </p:spPr>
-        <p:txBody>
-          <a:bodyPr>
-            <a:noAutofit/>
-          </a:bodyPr>
-          <a:lstStyle/>
-          <a:p>
-            <a:r>
-              <a:rPr lang="en-US" sz="3200" dirty="0">
-                <a:latin typeface="Arial" panose="020B0604020202020204" pitchFamily="34" charset="0"/>
-                <a:cs typeface="Arial" panose="020B0604020202020204" pitchFamily="34" charset="0"/>
-              </a:rPr>
-              <a:t>I enjoy technical work much more than management.</a:t>
-            </a:r>
-          </a:p>
-          <a:p>
-            <a:pPr lvl="1"/>
-            <a:r>
-              <a:rPr lang="en-US" sz="2800" dirty="0">
-                <a:latin typeface="Arial" panose="020B0604020202020204" pitchFamily="34" charset="0"/>
-                <a:cs typeface="Arial" panose="020B0604020202020204" pitchFamily="34" charset="0"/>
-              </a:rPr>
-              <a:t>Large companies have dual career tracks, not so sure about universities.</a:t>
-            </a:r>
-          </a:p>
-          <a:p>
-            <a:r>
-              <a:rPr lang="en-US" sz="3200" dirty="0">
-                <a:latin typeface="Arial" panose="020B0604020202020204" pitchFamily="34" charset="0"/>
-                <a:cs typeface="Arial" panose="020B0604020202020204" pitchFamily="34" charset="0"/>
-              </a:rPr>
-              <a:t>Income in academia is limited.</a:t>
-            </a:r>
-          </a:p>
-          <a:p>
-            <a:r>
-              <a:rPr lang="en-US" sz="3200" dirty="0">
-                <a:latin typeface="Arial" panose="020B0604020202020204" pitchFamily="34" charset="0"/>
-                <a:cs typeface="Arial" panose="020B0604020202020204" pitchFamily="34" charset="0"/>
-              </a:rPr>
-              <a:t>Working in academia offers lots of opportunities, focusing on the important once is a challenge. (both for mental health and for career)</a:t>
-            </a:r>
-          </a:p>
-        </p:txBody>
-      </p:sp>
-      <p:sp>
-        <p:nvSpPr>
-          <p:cNvPr id="13" name="Title 1">
-            <a:extLst>
-              <a:ext uri="{FF2B5EF4-FFF2-40B4-BE49-F238E27FC236}">
-                <a16:creationId xmlns:a16="http://schemas.microsoft.com/office/drawing/2014/main" id="{0558C11D-762A-AC96-58EA-A7BF0B1BB94F}"/>
-              </a:ext>
-            </a:extLst>
-          </p:cNvPr>
-          <p:cNvSpPr>
-            <a:spLocks noGrp="1"/>
-          </p:cNvSpPr>
-          <p:nvPr>
-            <p:ph type="title"/>
-          </p:nvPr>
-        </p:nvSpPr>
-        <p:spPr>
-          <a:xfrm>
-            <a:off x="271662" y="267785"/>
-            <a:ext cx="11686776" cy="1579148"/>
-          </a:xfrm>
-        </p:spPr>
-        <p:txBody>
-          <a:bodyPr vert="horz" lIns="91440" tIns="45720" rIns="91440" bIns="45720" rtlCol="0" anchor="t">
-            <a:normAutofit/>
-          </a:bodyPr>
-          <a:lstStyle/>
-          <a:p>
-            <a:r>
-              <a:rPr lang="en-US" sz="6000" kern="1200" dirty="0">
-                <a:latin typeface="Arial" panose="020B0604020202020204" pitchFamily="34" charset="0"/>
-                <a:cs typeface="Arial" panose="020B0604020202020204" pitchFamily="34" charset="0"/>
-              </a:rPr>
-              <a:t>What has been a challenge</a:t>
-            </a:r>
-          </a:p>
-        </p:txBody>
-      </p:sp>
-    </p:spTree>
-    <p:extLst>
-      <p:ext uri="{BB962C8B-B14F-4D97-AF65-F5344CB8AC3E}">
-        <p14:creationId xmlns:p14="http://schemas.microsoft.com/office/powerpoint/2010/main" val="1860155385"/>
-      </p:ext>
-    </p:extLst>
-  </p:cSld>
-  <p:clrMapOvr>
-    <a:masterClrMapping/>
-  </p:clrMapOvr>
-</p:sld>
-</file>
-
-<file path=ppt/slides/slide11.xml><?xml version="1.0" encoding="utf-8"?>
-<p:sld xmlns:a="http://schemas.openxmlformats.org/drawingml/2006/main" xmlns:r="http://schemas.openxmlformats.org/officeDocument/2006/relationships" xmlns:p="http://schemas.openxmlformats.org/presentationml/2006/main">
-  <p:cSld>
-    <p:bg>
-      <p:bgPr>
-        <a:solidFill>
-          <a:schemeClr val="bg1"/>
-        </a:solidFill>
-        <a:effectLst/>
-      </p:bgPr>
-    </p:bg>
-    <p:spTree>
-      <p:nvGrpSpPr>
-        <p:cNvPr id="1" name="">
-          <a:extLst>
-            <a:ext uri="{FF2B5EF4-FFF2-40B4-BE49-F238E27FC236}">
               <a16:creationId xmlns:a16="http://schemas.microsoft.com/office/drawing/2014/main" id="{4D06D692-E95D-EC97-ABD8-16D2EAA0C32D}"/>
             </a:ext>
           </a:extLst>
@@ -5498,126 +5265,6 @@
       </p:grpSpPr>
       <p:sp>
         <p:nvSpPr>
-          <p:cNvPr id="2" name="Title 1">
-            <a:extLst>
-              <a:ext uri="{FF2B5EF4-FFF2-40B4-BE49-F238E27FC236}">
-                <a16:creationId xmlns:a16="http://schemas.microsoft.com/office/drawing/2014/main" id="{D4BBF1B0-7851-F7FC-C107-B6D92F66ACCB}"/>
-              </a:ext>
-            </a:extLst>
-          </p:cNvPr>
-          <p:cNvSpPr>
-            <a:spLocks noGrp="1"/>
-          </p:cNvSpPr>
-          <p:nvPr>
-            <p:ph type="title"/>
-          </p:nvPr>
-        </p:nvSpPr>
-        <p:spPr>
-          <a:xfrm>
-            <a:off x="271662" y="267785"/>
-            <a:ext cx="11686776" cy="1579148"/>
-          </a:xfrm>
-        </p:spPr>
-        <p:txBody>
-          <a:bodyPr vert="horz" lIns="91440" tIns="45720" rIns="91440" bIns="45720" rtlCol="0" anchor="t">
-            <a:normAutofit/>
-          </a:bodyPr>
-          <a:lstStyle/>
-          <a:p>
-            <a:r>
-              <a:rPr lang="en-US" sz="6000" kern="1200" dirty="0">
-                <a:latin typeface="Arial" panose="020B0604020202020204" pitchFamily="34" charset="0"/>
-                <a:cs typeface="Arial" panose="020B0604020202020204" pitchFamily="34" charset="0"/>
-              </a:rPr>
-              <a:t>Contents</a:t>
-            </a:r>
-          </a:p>
-        </p:txBody>
-      </p:sp>
-      <p:sp>
-        <p:nvSpPr>
-          <p:cNvPr id="3" name="Content Placeholder 2">
-            <a:extLst>
-              <a:ext uri="{FF2B5EF4-FFF2-40B4-BE49-F238E27FC236}">
-                <a16:creationId xmlns:a16="http://schemas.microsoft.com/office/drawing/2014/main" id="{67CEF747-3444-C847-2B27-AF8FEE79AC4B}"/>
-              </a:ext>
-            </a:extLst>
-          </p:cNvPr>
-          <p:cNvSpPr>
-            <a:spLocks noGrp="1"/>
-          </p:cNvSpPr>
-          <p:nvPr>
-            <p:ph idx="1"/>
-          </p:nvPr>
-        </p:nvSpPr>
-        <p:spPr>
-          <a:xfrm>
-            <a:off x="951872" y="1543883"/>
-            <a:ext cx="10842964" cy="4867934"/>
-          </a:xfrm>
-        </p:spPr>
-        <p:txBody>
-          <a:bodyPr>
-            <a:normAutofit/>
-          </a:bodyPr>
-          <a:lstStyle/>
-          <a:p>
-            <a:r>
-              <a:rPr lang="en-US" sz="3600" dirty="0">
-                <a:latin typeface="Arial" panose="020B0604020202020204" pitchFamily="34" charset="0"/>
-                <a:cs typeface="Arial" panose="020B0604020202020204" pitchFamily="34" charset="0"/>
-              </a:rPr>
-              <a:t>TODO</a:t>
-            </a:r>
-          </a:p>
-        </p:txBody>
-      </p:sp>
-    </p:spTree>
-    <p:extLst>
-      <p:ext uri="{BB962C8B-B14F-4D97-AF65-F5344CB8AC3E}">
-        <p14:creationId xmlns:p14="http://schemas.microsoft.com/office/powerpoint/2010/main" val="2159815909"/>
-      </p:ext>
-    </p:extLst>
-  </p:cSld>
-  <p:clrMapOvr>
-    <a:masterClrMapping/>
-  </p:clrMapOvr>
-</p:sld>
-</file>
-
-<file path=ppt/slides/slide3.xml><?xml version="1.0" encoding="utf-8"?>
-<p:sld xmlns:a="http://schemas.openxmlformats.org/drawingml/2006/main" xmlns:r="http://schemas.openxmlformats.org/officeDocument/2006/relationships" xmlns:p="http://schemas.openxmlformats.org/presentationml/2006/main">
-  <p:cSld>
-    <p:bg>
-      <p:bgPr>
-        <a:solidFill>
-          <a:schemeClr val="bg1"/>
-        </a:solidFill>
-        <a:effectLst/>
-      </p:bgPr>
-    </p:bg>
-    <p:spTree>
-      <p:nvGrpSpPr>
-        <p:cNvPr id="1" name="">
-          <a:extLst>
-            <a:ext uri="{FF2B5EF4-FFF2-40B4-BE49-F238E27FC236}">
-              <a16:creationId xmlns:a16="http://schemas.microsoft.com/office/drawing/2014/main" id="{05ED2993-06B4-A8CF-7A4A-7387C2BD9FD8}"/>
-            </a:ext>
-          </a:extLst>
-        </p:cNvPr>
-        <p:cNvGrpSpPr/>
-        <p:nvPr/>
-      </p:nvGrpSpPr>
-      <p:grpSpPr>
-        <a:xfrm>
-          <a:off x="0" y="0"/>
-          <a:ext cx="0" cy="0"/>
-          <a:chOff x="0" y="0"/>
-          <a:chExt cx="0" cy="0"/>
-        </a:xfrm>
-      </p:grpSpPr>
-      <p:sp>
-        <p:nvSpPr>
           <p:cNvPr id="3" name="Content Placeholder 2">
             <a:extLst>
               <a:ext uri="{FF2B5EF4-FFF2-40B4-BE49-F238E27FC236}">
@@ -5673,7 +5320,7 @@
                 <a:latin typeface="Arial" panose="020B0604020202020204" pitchFamily="34" charset="0"/>
                 <a:cs typeface="Arial" panose="020B0604020202020204" pitchFamily="34" charset="0"/>
               </a:rPr>
-              <a:t>Allow you to ask questions.</a:t>
+              <a:t>Allow for plenty of questions.</a:t>
             </a:r>
           </a:p>
           <a:p>
@@ -5765,7 +5412,7 @@
 </p:sld>
 </file>
 
-<file path=ppt/slides/slide4.xml><?xml version="1.0" encoding="utf-8"?>
+<file path=ppt/slides/slide3.xml><?xml version="1.0" encoding="utf-8"?>
 <p:sld xmlns:a="http://schemas.openxmlformats.org/drawingml/2006/main" xmlns:r="http://schemas.openxmlformats.org/officeDocument/2006/relationships" xmlns:p="http://schemas.openxmlformats.org/presentationml/2006/main">
   <p:cSld>
     <p:bg>
@@ -5935,7 +5582,7 @@
 </p:sld>
 </file>
 
-<file path=ppt/slides/slide5.xml><?xml version="1.0" encoding="utf-8"?>
+<file path=ppt/slides/slide4.xml><?xml version="1.0" encoding="utf-8"?>
 <p:sld xmlns:a="http://schemas.openxmlformats.org/drawingml/2006/main" xmlns:r="http://schemas.openxmlformats.org/officeDocument/2006/relationships" xmlns:p="http://schemas.openxmlformats.org/presentationml/2006/main">
   <p:cSld>
     <p:bg>
@@ -6021,7 +5668,7 @@
                 <a:latin typeface="Arial" panose="020B0604020202020204" pitchFamily="34" charset="0"/>
                 <a:cs typeface="Arial" panose="020B0604020202020204" pitchFamily="34" charset="0"/>
               </a:rPr>
-              <a:t>Deep technical work</a:t>
+              <a:t>Deep technical work, some leadership opportunities</a:t>
             </a:r>
           </a:p>
           <a:p>
@@ -6051,6 +5698,16 @@
                 <a:cs typeface="Arial" panose="020B0604020202020204" pitchFamily="34" charset="0"/>
               </a:rPr>
               <a:t>Deep technical work</a:t>
+            </a:r>
+          </a:p>
+          <a:p>
+            <a:pPr lvl="1"/>
+            <a:r>
+              <a:rPr lang="en-US" sz="2800" dirty="0">
+                <a:latin typeface="Arial" panose="020B0604020202020204" pitchFamily="34" charset="0"/>
+                <a:cs typeface="Arial" panose="020B0604020202020204" pitchFamily="34" charset="0"/>
+              </a:rPr>
+              <a:t>Responsibility for new initiatives</a:t>
             </a:r>
           </a:p>
           <a:p>
@@ -6135,7 +5792,7 @@
 </p:sld>
 </file>
 
-<file path=ppt/slides/slide6.xml><?xml version="1.0" encoding="utf-8"?>
+<file path=ppt/slides/slide5.xml><?xml version="1.0" encoding="utf-8"?>
 <p:sld xmlns:a="http://schemas.openxmlformats.org/drawingml/2006/main" xmlns:r="http://schemas.openxmlformats.org/officeDocument/2006/relationships" xmlns:p="http://schemas.openxmlformats.org/presentationml/2006/main">
   <p:cSld>
     <p:bg>
@@ -6230,15 +5887,6 @@
             </a:r>
           </a:p>
           <a:p>
-            <a:r>
-              <a:rPr lang="en-US" sz="3200" dirty="0">
-                <a:latin typeface="Arial" panose="020B0604020202020204" pitchFamily="34" charset="0"/>
-                <a:cs typeface="Arial" panose="020B0604020202020204" pitchFamily="34" charset="0"/>
-              </a:rPr>
-              <a:t>Co-Founder of a 3D printing/visualization start-up</a:t>
-            </a:r>
-          </a:p>
-          <a:p>
             <a:endParaRPr lang="en-US" sz="3200" dirty="0">
               <a:latin typeface="Arial" panose="020B0604020202020204" pitchFamily="34" charset="0"/>
               <a:cs typeface="Arial" panose="020B0604020202020204" pitchFamily="34" charset="0"/>
@@ -6327,7 +5975,7 @@
 </p:sld>
 </file>
 
-<file path=ppt/slides/slide7.xml><?xml version="1.0" encoding="utf-8"?>
+<file path=ppt/slides/slide6.xml><?xml version="1.0" encoding="utf-8"?>
 <p:sld xmlns:a="http://schemas.openxmlformats.org/drawingml/2006/main" xmlns:r="http://schemas.openxmlformats.org/officeDocument/2006/relationships" xmlns:p="http://schemas.openxmlformats.org/presentationml/2006/main">
   <p:cSld>
     <p:bg>
@@ -6424,7 +6072,7 @@
                 <a:latin typeface="Arial" panose="020B0604020202020204" pitchFamily="34" charset="0"/>
                 <a:cs typeface="Arial" panose="020B0604020202020204" pitchFamily="34" charset="0"/>
               </a:rPr>
-              <a:t>I am passionate about information representation and user interfaces.</a:t>
+              <a:t>I am passionate about information visualization and management and user interfaces.</a:t>
             </a:r>
           </a:p>
         </p:txBody>
@@ -6480,7 +6128,7 @@
 </p:sld>
 </file>
 
-<file path=ppt/slides/slide8.xml><?xml version="1.0" encoding="utf-8"?>
+<file path=ppt/slides/slide7.xml><?xml version="1.0" encoding="utf-8"?>
 <p:sld xmlns:a="http://schemas.openxmlformats.org/drawingml/2006/main" xmlns:r="http://schemas.openxmlformats.org/officeDocument/2006/relationships" xmlns:p="http://schemas.openxmlformats.org/presentationml/2006/main">
   <p:cSld>
     <p:bg>
@@ -6653,7 +6301,7 @@
 </p:sld>
 </file>
 
-<file path=ppt/slides/slide9.xml><?xml version="1.0" encoding="utf-8"?>
+<file path=ppt/slides/slide8.xml><?xml version="1.0" encoding="utf-8"?>
 <p:sld xmlns:a="http://schemas.openxmlformats.org/drawingml/2006/main" xmlns:r="http://schemas.openxmlformats.org/officeDocument/2006/relationships" xmlns:p="http://schemas.openxmlformats.org/presentationml/2006/main">
   <p:cSld>
     <p:bg>
@@ -6744,7 +6392,7 @@
                 <a:latin typeface="Arial" panose="020B0604020202020204" pitchFamily="34" charset="0"/>
                 <a:cs typeface="Arial" panose="020B0604020202020204" pitchFamily="34" charset="0"/>
               </a:rPr>
-              <a:t>Broad interest in science is required, and I enjoy it.</a:t>
+              <a:t>I have a broad interest in science, and this is required.</a:t>
             </a:r>
           </a:p>
           <a:p>
@@ -6753,7 +6401,7 @@
                 <a:latin typeface="Arial" panose="020B0604020202020204" pitchFamily="34" charset="0"/>
                 <a:cs typeface="Arial" panose="020B0604020202020204" pitchFamily="34" charset="0"/>
               </a:rPr>
-              <a:t>I got lucky, a lot. (career, immigration, health,…)</a:t>
+              <a:t>I got lucky, a lot. (career, immigration, health, networking)</a:t>
             </a:r>
           </a:p>
           <a:p>
@@ -6818,6 +6466,154 @@
     <p:extLst>
       <p:ext uri="{BB962C8B-B14F-4D97-AF65-F5344CB8AC3E}">
         <p14:creationId xmlns:p14="http://schemas.microsoft.com/office/powerpoint/2010/main" val="3177790572"/>
+      </p:ext>
+    </p:extLst>
+  </p:cSld>
+  <p:clrMapOvr>
+    <a:masterClrMapping/>
+  </p:clrMapOvr>
+</p:sld>
+</file>
+
+<file path=ppt/slides/slide9.xml><?xml version="1.0" encoding="utf-8"?>
+<p:sld xmlns:a="http://schemas.openxmlformats.org/drawingml/2006/main" xmlns:r="http://schemas.openxmlformats.org/officeDocument/2006/relationships" xmlns:p="http://schemas.openxmlformats.org/presentationml/2006/main">
+  <p:cSld>
+    <p:bg>
+      <p:bgPr>
+        <a:solidFill>
+          <a:schemeClr val="bg1"/>
+        </a:solidFill>
+        <a:effectLst/>
+      </p:bgPr>
+    </p:bg>
+    <p:spTree>
+      <p:nvGrpSpPr>
+        <p:cNvPr id="1" name="">
+          <a:extLst>
+            <a:ext uri="{FF2B5EF4-FFF2-40B4-BE49-F238E27FC236}">
+              <a16:creationId xmlns:a16="http://schemas.microsoft.com/office/drawing/2014/main" id="{0FB80583-B17F-60EF-99CC-296C8448B765}"/>
+            </a:ext>
+          </a:extLst>
+        </p:cNvPr>
+        <p:cNvGrpSpPr/>
+        <p:nvPr/>
+      </p:nvGrpSpPr>
+      <p:grpSpPr>
+        <a:xfrm>
+          <a:off x="0" y="0"/>
+          <a:ext cx="0" cy="0"/>
+          <a:chOff x="0" y="0"/>
+          <a:chExt cx="0" cy="0"/>
+        </a:xfrm>
+      </p:grpSpPr>
+      <p:sp>
+        <p:nvSpPr>
+          <p:cNvPr id="3" name="Content Placeholder 2">
+            <a:extLst>
+              <a:ext uri="{FF2B5EF4-FFF2-40B4-BE49-F238E27FC236}">
+                <a16:creationId xmlns:a16="http://schemas.microsoft.com/office/drawing/2014/main" id="{91F68BB5-38F8-1B70-F687-A9A5CCAE13AB}"/>
+              </a:ext>
+            </a:extLst>
+          </p:cNvPr>
+          <p:cNvSpPr>
+            <a:spLocks noGrp="1"/>
+          </p:cNvSpPr>
+          <p:nvPr>
+            <p:ph idx="1"/>
+          </p:nvPr>
+        </p:nvSpPr>
+        <p:spPr>
+          <a:xfrm>
+            <a:off x="951872" y="1543883"/>
+            <a:ext cx="10842964" cy="4867934"/>
+          </a:xfrm>
+        </p:spPr>
+        <p:txBody>
+          <a:bodyPr>
+            <a:noAutofit/>
+          </a:bodyPr>
+          <a:lstStyle/>
+          <a:p>
+            <a:r>
+              <a:rPr lang="en-US" sz="3200" dirty="0">
+                <a:latin typeface="Arial" panose="020B0604020202020204" pitchFamily="34" charset="0"/>
+                <a:cs typeface="Arial" panose="020B0604020202020204" pitchFamily="34" charset="0"/>
+              </a:rPr>
+              <a:t>I enjoy technical work much more than management.</a:t>
+            </a:r>
+          </a:p>
+          <a:p>
+            <a:pPr lvl="1"/>
+            <a:r>
+              <a:rPr lang="en-US" sz="2800" dirty="0">
+                <a:latin typeface="Arial" panose="020B0604020202020204" pitchFamily="34" charset="0"/>
+                <a:cs typeface="Arial" panose="020B0604020202020204" pitchFamily="34" charset="0"/>
+              </a:rPr>
+              <a:t>Large companies have dual career tracks, not so sure about universities.</a:t>
+            </a:r>
+          </a:p>
+          <a:p>
+            <a:r>
+              <a:rPr lang="en-US" sz="3200" dirty="0">
+                <a:latin typeface="Arial" panose="020B0604020202020204" pitchFamily="34" charset="0"/>
+                <a:cs typeface="Arial" panose="020B0604020202020204" pitchFamily="34" charset="0"/>
+              </a:rPr>
+              <a:t>Income in academia is limited.</a:t>
+            </a:r>
+          </a:p>
+          <a:p>
+            <a:r>
+              <a:rPr lang="en-US" sz="3200" dirty="0">
+                <a:latin typeface="Arial" panose="020B0604020202020204" pitchFamily="34" charset="0"/>
+                <a:cs typeface="Arial" panose="020B0604020202020204" pitchFamily="34" charset="0"/>
+              </a:rPr>
+              <a:t>Working in academia offers lots of opportunities, focusing on the important once is a challenge. (both for mental health and for career)</a:t>
+            </a:r>
+          </a:p>
+        </p:txBody>
+      </p:sp>
+      <p:sp>
+        <p:nvSpPr>
+          <p:cNvPr id="13" name="Title 1">
+            <a:extLst>
+              <a:ext uri="{FF2B5EF4-FFF2-40B4-BE49-F238E27FC236}">
+                <a16:creationId xmlns:a16="http://schemas.microsoft.com/office/drawing/2014/main" id="{0558C11D-762A-AC96-58EA-A7BF0B1BB94F}"/>
+              </a:ext>
+            </a:extLst>
+          </p:cNvPr>
+          <p:cNvSpPr>
+            <a:spLocks noGrp="1"/>
+          </p:cNvSpPr>
+          <p:nvPr>
+            <p:ph type="title"/>
+          </p:nvPr>
+        </p:nvSpPr>
+        <p:spPr>
+          <a:xfrm>
+            <a:off x="271662" y="267785"/>
+            <a:ext cx="11686776" cy="1579148"/>
+          </a:xfrm>
+        </p:spPr>
+        <p:txBody>
+          <a:bodyPr vert="horz" lIns="91440" tIns="45720" rIns="91440" bIns="45720" rtlCol="0" anchor="t">
+            <a:normAutofit/>
+          </a:bodyPr>
+          <a:lstStyle/>
+          <a:p>
+            <a:r>
+              <a:rPr lang="en-US" sz="6000" kern="1200" dirty="0">
+                <a:latin typeface="Arial" panose="020B0604020202020204" pitchFamily="34" charset="0"/>
+                <a:cs typeface="Arial" panose="020B0604020202020204" pitchFamily="34" charset="0"/>
+              </a:rPr>
+              <a:t>What has been a challenge</a:t>
+            </a:r>
+          </a:p>
+        </p:txBody>
+      </p:sp>
+    </p:spTree>
+    <p:extLst>
+      <p:ext uri="{BB962C8B-B14F-4D97-AF65-F5344CB8AC3E}">
+        <p14:creationId xmlns:p14="http://schemas.microsoft.com/office/powerpoint/2010/main" val="1860155385"/>
       </p:ext>
     </p:extLst>
   </p:cSld>

--- a/CareerSpotlights/RobertHenschel.pptx
+++ b/CareerSpotlights/RobertHenschel.pptx
@@ -5,19 +5,20 @@
     <p:sldMasterId id="2147483648" r:id="rId1"/>
   </p:sldMasterIdLst>
   <p:notesMasterIdLst>
-    <p:notesMasterId r:id="rId12"/>
+    <p:notesMasterId r:id="rId13"/>
   </p:notesMasterIdLst>
   <p:sldIdLst>
     <p:sldId id="256" r:id="rId2"/>
     <p:sldId id="290" r:id="rId3"/>
     <p:sldId id="291" r:id="rId4"/>
-    <p:sldId id="266" r:id="rId5"/>
-    <p:sldId id="296" r:id="rId6"/>
-    <p:sldId id="293" r:id="rId7"/>
-    <p:sldId id="260" r:id="rId8"/>
-    <p:sldId id="292" r:id="rId9"/>
-    <p:sldId id="295" r:id="rId10"/>
-    <p:sldId id="294" r:id="rId11"/>
+    <p:sldId id="297" r:id="rId5"/>
+    <p:sldId id="266" r:id="rId6"/>
+    <p:sldId id="296" r:id="rId7"/>
+    <p:sldId id="293" r:id="rId8"/>
+    <p:sldId id="260" r:id="rId9"/>
+    <p:sldId id="292" r:id="rId10"/>
+    <p:sldId id="295" r:id="rId11"/>
+    <p:sldId id="294" r:id="rId12"/>
   </p:sldIdLst>
   <p:sldSz cx="12192000" cy="6858000"/>
   <p:notesSz cx="6858000" cy="9144000"/>
@@ -206,7 +207,7 @@
           <a:p>
             <a:fld id="{7CC5E172-612A-A14A-BBDA-41B2CCDDE8F2}" type="datetimeFigureOut">
               <a:rPr lang="en-US" smtClean="0"/>
-              <a:t>5/26/26</a:t>
+              <a:t>5/27/26</a:t>
             </a:fld>
             <a:endParaRPr lang="en-US"/>
           </a:p>
@@ -673,6 +674,114 @@
   <p:cSld>
     <p:spTree>
       <p:nvGrpSpPr>
+        <p:cNvPr id="1" name="">
+          <a:extLst>
+            <a:ext uri="{FF2B5EF4-FFF2-40B4-BE49-F238E27FC236}">
+              <a16:creationId xmlns:a16="http://schemas.microsoft.com/office/drawing/2014/main" id="{D4CAEC3D-19F9-2F67-A9FB-DE0687AB7971}"/>
+            </a:ext>
+          </a:extLst>
+        </p:cNvPr>
+        <p:cNvGrpSpPr/>
+        <p:nvPr/>
+      </p:nvGrpSpPr>
+      <p:grpSpPr>
+        <a:xfrm>
+          <a:off x="0" y="0"/>
+          <a:ext cx="0" cy="0"/>
+          <a:chOff x="0" y="0"/>
+          <a:chExt cx="0" cy="0"/>
+        </a:xfrm>
+      </p:grpSpPr>
+      <p:sp>
+        <p:nvSpPr>
+          <p:cNvPr id="2" name="Slide Image Placeholder 1">
+            <a:extLst>
+              <a:ext uri="{FF2B5EF4-FFF2-40B4-BE49-F238E27FC236}">
+                <a16:creationId xmlns:a16="http://schemas.microsoft.com/office/drawing/2014/main" id="{5BAC543D-8F85-82A0-5F02-CF1AE7EC02E5}"/>
+              </a:ext>
+            </a:extLst>
+          </p:cNvPr>
+          <p:cNvSpPr>
+            <a:spLocks noGrp="1" noRot="1" noChangeAspect="1"/>
+          </p:cNvSpPr>
+          <p:nvPr>
+            <p:ph type="sldImg"/>
+          </p:nvPr>
+        </p:nvSpPr>
+        <p:spPr/>
+      </p:sp>
+      <p:sp>
+        <p:nvSpPr>
+          <p:cNvPr id="3" name="Notes Placeholder 2">
+            <a:extLst>
+              <a:ext uri="{FF2B5EF4-FFF2-40B4-BE49-F238E27FC236}">
+                <a16:creationId xmlns:a16="http://schemas.microsoft.com/office/drawing/2014/main" id="{840B1C59-29B0-491E-CA54-242806FDA962}"/>
+              </a:ext>
+            </a:extLst>
+          </p:cNvPr>
+          <p:cNvSpPr>
+            <a:spLocks noGrp="1"/>
+          </p:cNvSpPr>
+          <p:nvPr>
+            <p:ph type="body" idx="1"/>
+          </p:nvPr>
+        </p:nvSpPr>
+        <p:spPr/>
+        <p:txBody>
+          <a:bodyPr/>
+          <a:lstStyle/>
+          <a:p>
+            <a:endParaRPr lang="en-US" dirty="0"/>
+          </a:p>
+        </p:txBody>
+      </p:sp>
+      <p:sp>
+        <p:nvSpPr>
+          <p:cNvPr id="4" name="Slide Number Placeholder 3">
+            <a:extLst>
+              <a:ext uri="{FF2B5EF4-FFF2-40B4-BE49-F238E27FC236}">
+                <a16:creationId xmlns:a16="http://schemas.microsoft.com/office/drawing/2014/main" id="{6BFEF719-A59A-B770-3B5D-38DD27D75FAC}"/>
+              </a:ext>
+            </a:extLst>
+          </p:cNvPr>
+          <p:cNvSpPr>
+            <a:spLocks noGrp="1"/>
+          </p:cNvSpPr>
+          <p:nvPr>
+            <p:ph type="sldNum" sz="quarter" idx="10"/>
+          </p:nvPr>
+        </p:nvSpPr>
+        <p:spPr/>
+        <p:txBody>
+          <a:bodyPr/>
+          <a:lstStyle/>
+          <a:p>
+            <a:fld id="{06E7E6BE-52A2-7F4D-9C1A-77BE2120A1F0}" type="slidenum">
+              <a:rPr lang="en-US" smtClean="0"/>
+              <a:t>4</a:t>
+            </a:fld>
+            <a:endParaRPr lang="en-US"/>
+          </a:p>
+        </p:txBody>
+      </p:sp>
+    </p:spTree>
+    <p:extLst>
+      <p:ext uri="{BB962C8B-B14F-4D97-AF65-F5344CB8AC3E}">
+        <p14:creationId xmlns:p14="http://schemas.microsoft.com/office/powerpoint/2010/main" val="4018614775"/>
+      </p:ext>
+    </p:extLst>
+  </p:cSld>
+  <p:clrMapOvr>
+    <a:masterClrMapping/>
+  </p:clrMapOvr>
+</p:notes>
+</file>
+
+<file path=ppt/notesSlides/notesSlide4.xml><?xml version="1.0" encoding="utf-8"?>
+<p:notes xmlns:a="http://schemas.openxmlformats.org/drawingml/2006/main" xmlns:r="http://schemas.openxmlformats.org/officeDocument/2006/relationships" xmlns:p="http://schemas.openxmlformats.org/presentationml/2006/main">
+  <p:cSld>
+    <p:spTree>
+      <p:nvGrpSpPr>
         <p:cNvPr id="1" name=""/>
         <p:cNvGrpSpPr/>
         <p:nvPr/>
@@ -733,7 +842,7 @@
           <a:p>
             <a:fld id="{06E7E6BE-52A2-7F4D-9C1A-77BE2120A1F0}" type="slidenum">
               <a:rPr lang="en-US" smtClean="0"/>
-              <a:t>4</a:t>
+              <a:t>5</a:t>
             </a:fld>
             <a:endParaRPr lang="en-US"/>
           </a:p>
@@ -752,7 +861,7 @@
 </p:notes>
 </file>
 
-<file path=ppt/notesSlides/notesSlide4.xml><?xml version="1.0" encoding="utf-8"?>
+<file path=ppt/notesSlides/notesSlide5.xml><?xml version="1.0" encoding="utf-8"?>
 <p:notes xmlns:a="http://schemas.openxmlformats.org/drawingml/2006/main" xmlns:r="http://schemas.openxmlformats.org/officeDocument/2006/relationships" xmlns:p="http://schemas.openxmlformats.org/presentationml/2006/main">
   <p:cSld>
     <p:spTree>
@@ -841,7 +950,7 @@
           <a:p>
             <a:fld id="{06E7E6BE-52A2-7F4D-9C1A-77BE2120A1F0}" type="slidenum">
               <a:rPr lang="en-US" smtClean="0"/>
-              <a:t>5</a:t>
+              <a:t>6</a:t>
             </a:fld>
             <a:endParaRPr lang="en-US"/>
           </a:p>
@@ -860,7 +969,7 @@
 </p:notes>
 </file>
 
-<file path=ppt/notesSlides/notesSlide5.xml><?xml version="1.0" encoding="utf-8"?>
+<file path=ppt/notesSlides/notesSlide6.xml><?xml version="1.0" encoding="utf-8"?>
 <p:notes xmlns:a="http://schemas.openxmlformats.org/drawingml/2006/main" xmlns:r="http://schemas.openxmlformats.org/officeDocument/2006/relationships" xmlns:p="http://schemas.openxmlformats.org/presentationml/2006/main">
   <p:cSld>
     <p:spTree>
@@ -949,7 +1058,7 @@
           <a:p>
             <a:fld id="{06E7E6BE-52A2-7F4D-9C1A-77BE2120A1F0}" type="slidenum">
               <a:rPr lang="en-US" smtClean="0"/>
-              <a:t>6</a:t>
+              <a:t>7</a:t>
             </a:fld>
             <a:endParaRPr lang="en-US"/>
           </a:p>
@@ -968,7 +1077,7 @@
 </p:notes>
 </file>
 
-<file path=ppt/notesSlides/notesSlide6.xml><?xml version="1.0" encoding="utf-8"?>
+<file path=ppt/notesSlides/notesSlide7.xml><?xml version="1.0" encoding="utf-8"?>
 <p:notes xmlns:a="http://schemas.openxmlformats.org/drawingml/2006/main" xmlns:r="http://schemas.openxmlformats.org/officeDocument/2006/relationships" xmlns:p="http://schemas.openxmlformats.org/presentationml/2006/main">
   <p:cSld>
     <p:spTree>
@@ -1057,7 +1166,7 @@
           <a:p>
             <a:fld id="{06E7E6BE-52A2-7F4D-9C1A-77BE2120A1F0}" type="slidenum">
               <a:rPr lang="en-US" smtClean="0"/>
-              <a:t>8</a:t>
+              <a:t>9</a:t>
             </a:fld>
             <a:endParaRPr lang="en-US"/>
           </a:p>
@@ -1076,7 +1185,7 @@
 </p:notes>
 </file>
 
-<file path=ppt/notesSlides/notesSlide7.xml><?xml version="1.0" encoding="utf-8"?>
+<file path=ppt/notesSlides/notesSlide8.xml><?xml version="1.0" encoding="utf-8"?>
 <p:notes xmlns:a="http://schemas.openxmlformats.org/drawingml/2006/main" xmlns:r="http://schemas.openxmlformats.org/officeDocument/2006/relationships" xmlns:p="http://schemas.openxmlformats.org/presentationml/2006/main">
   <p:cSld>
     <p:spTree>
@@ -1165,7 +1274,7 @@
           <a:p>
             <a:fld id="{06E7E6BE-52A2-7F4D-9C1A-77BE2120A1F0}" type="slidenum">
               <a:rPr lang="en-US" smtClean="0"/>
-              <a:t>9</a:t>
+              <a:t>10</a:t>
             </a:fld>
             <a:endParaRPr lang="en-US"/>
           </a:p>
@@ -1184,7 +1293,7 @@
 </p:notes>
 </file>
 
-<file path=ppt/notesSlides/notesSlide8.xml><?xml version="1.0" encoding="utf-8"?>
+<file path=ppt/notesSlides/notesSlide9.xml><?xml version="1.0" encoding="utf-8"?>
 <p:notes xmlns:a="http://schemas.openxmlformats.org/drawingml/2006/main" xmlns:r="http://schemas.openxmlformats.org/officeDocument/2006/relationships" xmlns:p="http://schemas.openxmlformats.org/presentationml/2006/main">
   <p:cSld>
     <p:spTree>
@@ -1273,7 +1382,7 @@
           <a:p>
             <a:fld id="{06E7E6BE-52A2-7F4D-9C1A-77BE2120A1F0}" type="slidenum">
               <a:rPr lang="en-US" smtClean="0"/>
-              <a:t>10</a:t>
+              <a:t>11</a:t>
             </a:fld>
             <a:endParaRPr lang="en-US"/>
           </a:p>
@@ -1439,7 +1548,7 @@
           <a:p>
             <a:fld id="{779E5E78-1F6F-C14E-893C-D8A0249D8C93}" type="datetimeFigureOut">
               <a:rPr lang="en-US" smtClean="0"/>
-              <a:t>5/26/26</a:t>
+              <a:t>5/27/26</a:t>
             </a:fld>
             <a:endParaRPr lang="en-US"/>
           </a:p>
@@ -1637,7 +1746,7 @@
           <a:p>
             <a:fld id="{779E5E78-1F6F-C14E-893C-D8A0249D8C93}" type="datetimeFigureOut">
               <a:rPr lang="en-US" smtClean="0"/>
-              <a:t>5/26/26</a:t>
+              <a:t>5/27/26</a:t>
             </a:fld>
             <a:endParaRPr lang="en-US"/>
           </a:p>
@@ -1845,7 +1954,7 @@
           <a:p>
             <a:fld id="{779E5E78-1F6F-C14E-893C-D8A0249D8C93}" type="datetimeFigureOut">
               <a:rPr lang="en-US" smtClean="0"/>
-              <a:t>5/26/26</a:t>
+              <a:t>5/27/26</a:t>
             </a:fld>
             <a:endParaRPr lang="en-US"/>
           </a:p>
@@ -2043,7 +2152,7 @@
           <a:p>
             <a:fld id="{779E5E78-1F6F-C14E-893C-D8A0249D8C93}" type="datetimeFigureOut">
               <a:rPr lang="en-US" smtClean="0"/>
-              <a:t>5/26/26</a:t>
+              <a:t>5/27/26</a:t>
             </a:fld>
             <a:endParaRPr lang="en-US"/>
           </a:p>
@@ -2671,7 +2780,7 @@
           <a:p>
             <a:fld id="{779E5E78-1F6F-C14E-893C-D8A0249D8C93}" type="datetimeFigureOut">
               <a:rPr lang="en-US" smtClean="0"/>
-              <a:t>5/26/26</a:t>
+              <a:t>5/27/26</a:t>
             </a:fld>
             <a:endParaRPr lang="en-US"/>
           </a:p>
@@ -2936,7 +3045,7 @@
           <a:p>
             <a:fld id="{779E5E78-1F6F-C14E-893C-D8A0249D8C93}" type="datetimeFigureOut">
               <a:rPr lang="en-US" smtClean="0"/>
-              <a:t>5/26/26</a:t>
+              <a:t>5/27/26</a:t>
             </a:fld>
             <a:endParaRPr lang="en-US"/>
           </a:p>
@@ -3348,7 +3457,7 @@
           <a:p>
             <a:fld id="{779E5E78-1F6F-C14E-893C-D8A0249D8C93}" type="datetimeFigureOut">
               <a:rPr lang="en-US" smtClean="0"/>
-              <a:t>5/26/26</a:t>
+              <a:t>5/27/26</a:t>
             </a:fld>
             <a:endParaRPr lang="en-US"/>
           </a:p>
@@ -3489,7 +3598,7 @@
           <a:p>
             <a:fld id="{779E5E78-1F6F-C14E-893C-D8A0249D8C93}" type="datetimeFigureOut">
               <a:rPr lang="en-US" smtClean="0"/>
-              <a:t>5/26/26</a:t>
+              <a:t>5/27/26</a:t>
             </a:fld>
             <a:endParaRPr lang="en-US"/>
           </a:p>
@@ -3602,7 +3711,7 @@
           <a:p>
             <a:fld id="{779E5E78-1F6F-C14E-893C-D8A0249D8C93}" type="datetimeFigureOut">
               <a:rPr lang="en-US" smtClean="0"/>
-              <a:t>5/26/26</a:t>
+              <a:t>5/27/26</a:t>
             </a:fld>
             <a:endParaRPr lang="en-US"/>
           </a:p>
@@ -3913,7 +4022,7 @@
           <a:p>
             <a:fld id="{779E5E78-1F6F-C14E-893C-D8A0249D8C93}" type="datetimeFigureOut">
               <a:rPr lang="en-US" smtClean="0"/>
-              <a:t>5/26/26</a:t>
+              <a:t>5/27/26</a:t>
             </a:fld>
             <a:endParaRPr lang="en-US"/>
           </a:p>
@@ -4201,7 +4310,7 @@
           <a:p>
             <a:fld id="{779E5E78-1F6F-C14E-893C-D8A0249D8C93}" type="datetimeFigureOut">
               <a:rPr lang="en-US" smtClean="0"/>
-              <a:t>5/26/26</a:t>
+              <a:t>5/27/26</a:t>
             </a:fld>
             <a:endParaRPr lang="en-US"/>
           </a:p>
@@ -4442,7 +4551,7 @@
           <a:p>
             <a:fld id="{779E5E78-1F6F-C14E-893C-D8A0249D8C93}" type="datetimeFigureOut">
               <a:rPr lang="en-US" smtClean="0"/>
-              <a:t>5/26/26</a:t>
+              <a:t>5/27/26</a:t>
             </a:fld>
             <a:endParaRPr lang="en-US"/>
           </a:p>
@@ -4859,29 +4968,6 @@
           <a:chExt cx="0" cy="0"/>
         </a:xfrm>
       </p:grpSpPr>
-      <p:pic>
-        <p:nvPicPr>
-          <p:cNvPr id="4" name="Picture 3"/>
-          <p:cNvPicPr>
-            <a:picLocks noChangeAspect="1"/>
-          </p:cNvPicPr>
-          <p:nvPr/>
-        </p:nvPicPr>
-        <p:blipFill rotWithShape="1">
-          <a:blip r:embed="rId2"/>
-          <a:srcRect l="153" r="1144"/>
-          <a:stretch/>
-        </p:blipFill>
-        <p:spPr>
-          <a:xfrm>
-            <a:off x="5432214" y="1921232"/>
-            <a:ext cx="6546426" cy="4722808"/>
-          </a:xfrm>
-          <a:prstGeom prst="rect">
-            <a:avLst/>
-          </a:prstGeom>
-        </p:spPr>
-      </p:pic>
       <p:sp>
         <p:nvSpPr>
           <p:cNvPr id="2" name="Title 1">
@@ -4980,7 +5066,7 @@
               <a:rPr lang="en-US" sz="1800" dirty="0">
                 <a:latin typeface="Arial" panose="020B0604020202020204" pitchFamily="34" charset="0"/>
                 <a:cs typeface="Arial" panose="020B0604020202020204" pitchFamily="34" charset="0"/>
-                <a:hlinkClick r:id="rId3"/>
+                <a:hlinkClick r:id="rId2"/>
               </a:rPr>
               <a:t>henschel@iu.edu</a:t>
             </a:r>
@@ -4995,7 +5081,7 @@
               <a:rPr lang="en-US" sz="1800" dirty="0">
                 <a:latin typeface="Arial" panose="020B0604020202020204" pitchFamily="34" charset="0"/>
                 <a:cs typeface="Arial" panose="020B0604020202020204" pitchFamily="34" charset="0"/>
-                <a:hlinkClick r:id="rId4"/>
+                <a:hlinkClick r:id="rId3"/>
               </a:rPr>
               <a:t>robert.henschel@cendio.com</a:t>
             </a:r>
@@ -5028,7 +5114,7 @@
           <p:nvPr/>
         </p:nvPicPr>
         <p:blipFill>
-          <a:blip r:embed="rId5">
+          <a:blip r:embed="rId4">
             <a:extLst>
               <a:ext uri="{28A0092B-C50C-407E-A947-70E740481C1C}">
                 <a14:useLocalDpi xmlns:a14="http://schemas.microsoft.com/office/drawing/2010/main" val="0"/>
@@ -5075,7 +5161,7 @@
           <p:nvPr/>
         </p:nvPicPr>
         <p:blipFill>
-          <a:blip r:embed="rId6">
+          <a:blip r:embed="rId5">
             <a:extLst>
               <a:ext uri="{28A0092B-C50C-407E-A947-70E740481C1C}">
                 <a14:useLocalDpi xmlns:a14="http://schemas.microsoft.com/office/drawing/2010/main" val="0"/>
@@ -5122,7 +5208,7 @@
           <p:nvPr/>
         </p:nvPicPr>
         <p:blipFill>
-          <a:blip r:embed="rId7"/>
+          <a:blip r:embed="rId6"/>
           <a:stretch>
             <a:fillRect/>
           </a:stretch>
@@ -5131,6 +5217,66 @@
           <a:xfrm>
             <a:off x="1711420" y="4848674"/>
             <a:ext cx="398509" cy="361335"/>
+          </a:xfrm>
+          <a:prstGeom prst="rect">
+            <a:avLst/>
+          </a:prstGeom>
+        </p:spPr>
+      </p:pic>
+      <p:pic>
+        <p:nvPicPr>
+          <p:cNvPr id="8" name="Picture 7">
+            <a:extLst>
+              <a:ext uri="{FF2B5EF4-FFF2-40B4-BE49-F238E27FC236}">
+                <a16:creationId xmlns:a16="http://schemas.microsoft.com/office/drawing/2014/main" id="{9A00C7A7-4C17-735F-F0A5-45439E55890E}"/>
+              </a:ext>
+            </a:extLst>
+          </p:cNvPr>
+          <p:cNvPicPr>
+            <a:picLocks noChangeAspect="1"/>
+          </p:cNvPicPr>
+          <p:nvPr/>
+        </p:nvPicPr>
+        <p:blipFill>
+          <a:blip r:embed="rId7"/>
+          <a:stretch>
+            <a:fillRect/>
+          </a:stretch>
+        </p:blipFill>
+        <p:spPr>
+          <a:xfrm>
+            <a:off x="6586533" y="613779"/>
+            <a:ext cx="4311965" cy="5726828"/>
+          </a:xfrm>
+          <a:prstGeom prst="rect">
+            <a:avLst/>
+          </a:prstGeom>
+        </p:spPr>
+      </p:pic>
+      <p:pic>
+        <p:nvPicPr>
+          <p:cNvPr id="4" name="Picture 3">
+            <a:extLst>
+              <a:ext uri="{FF2B5EF4-FFF2-40B4-BE49-F238E27FC236}">
+                <a16:creationId xmlns:a16="http://schemas.microsoft.com/office/drawing/2014/main" id="{C8FC80ED-EC02-A6B4-9D58-A9A73DD49760}"/>
+              </a:ext>
+            </a:extLst>
+          </p:cNvPr>
+          <p:cNvPicPr>
+            <a:picLocks noChangeAspect="1"/>
+          </p:cNvPicPr>
+          <p:nvPr/>
+        </p:nvPicPr>
+        <p:blipFill>
+          <a:blip r:embed="rId8"/>
+          <a:stretch>
+            <a:fillRect/>
+          </a:stretch>
+        </p:blipFill>
+        <p:spPr>
+          <a:xfrm>
+            <a:off x="2258060" y="4839278"/>
+            <a:ext cx="398509" cy="398509"/>
           </a:xfrm>
           <a:prstGeom prst="rect">
             <a:avLst/>
@@ -5151,6 +5297,154 @@
 </file>
 
 <file path=ppt/slides/slide10.xml><?xml version="1.0" encoding="utf-8"?>
+<p:sld xmlns:a="http://schemas.openxmlformats.org/drawingml/2006/main" xmlns:r="http://schemas.openxmlformats.org/officeDocument/2006/relationships" xmlns:p="http://schemas.openxmlformats.org/presentationml/2006/main">
+  <p:cSld>
+    <p:bg>
+      <p:bgPr>
+        <a:solidFill>
+          <a:schemeClr val="bg1"/>
+        </a:solidFill>
+        <a:effectLst/>
+      </p:bgPr>
+    </p:bg>
+    <p:spTree>
+      <p:nvGrpSpPr>
+        <p:cNvPr id="1" name="">
+          <a:extLst>
+            <a:ext uri="{FF2B5EF4-FFF2-40B4-BE49-F238E27FC236}">
+              <a16:creationId xmlns:a16="http://schemas.microsoft.com/office/drawing/2014/main" id="{0FB80583-B17F-60EF-99CC-296C8448B765}"/>
+            </a:ext>
+          </a:extLst>
+        </p:cNvPr>
+        <p:cNvGrpSpPr/>
+        <p:nvPr/>
+      </p:nvGrpSpPr>
+      <p:grpSpPr>
+        <a:xfrm>
+          <a:off x="0" y="0"/>
+          <a:ext cx="0" cy="0"/>
+          <a:chOff x="0" y="0"/>
+          <a:chExt cx="0" cy="0"/>
+        </a:xfrm>
+      </p:grpSpPr>
+      <p:sp>
+        <p:nvSpPr>
+          <p:cNvPr id="3" name="Content Placeholder 2">
+            <a:extLst>
+              <a:ext uri="{FF2B5EF4-FFF2-40B4-BE49-F238E27FC236}">
+                <a16:creationId xmlns:a16="http://schemas.microsoft.com/office/drawing/2014/main" id="{91F68BB5-38F8-1B70-F687-A9A5CCAE13AB}"/>
+              </a:ext>
+            </a:extLst>
+          </p:cNvPr>
+          <p:cNvSpPr>
+            <a:spLocks noGrp="1"/>
+          </p:cNvSpPr>
+          <p:nvPr>
+            <p:ph idx="1"/>
+          </p:nvPr>
+        </p:nvSpPr>
+        <p:spPr>
+          <a:xfrm>
+            <a:off x="951872" y="1543883"/>
+            <a:ext cx="10842964" cy="4867934"/>
+          </a:xfrm>
+        </p:spPr>
+        <p:txBody>
+          <a:bodyPr>
+            <a:noAutofit/>
+          </a:bodyPr>
+          <a:lstStyle/>
+          <a:p>
+            <a:r>
+              <a:rPr lang="en-US" sz="3200" dirty="0">
+                <a:latin typeface="Arial" panose="020B0604020202020204" pitchFamily="34" charset="0"/>
+                <a:cs typeface="Arial" panose="020B0604020202020204" pitchFamily="34" charset="0"/>
+              </a:rPr>
+              <a:t>I enjoy technical work much more than management.</a:t>
+            </a:r>
+          </a:p>
+          <a:p>
+            <a:pPr lvl="1"/>
+            <a:r>
+              <a:rPr lang="en-US" sz="2800" dirty="0">
+                <a:latin typeface="Arial" panose="020B0604020202020204" pitchFamily="34" charset="0"/>
+                <a:cs typeface="Arial" panose="020B0604020202020204" pitchFamily="34" charset="0"/>
+              </a:rPr>
+              <a:t>Large companies have dual career tracks, not so sure about universities.</a:t>
+            </a:r>
+          </a:p>
+          <a:p>
+            <a:r>
+              <a:rPr lang="en-US" sz="3200" dirty="0">
+                <a:latin typeface="Arial" panose="020B0604020202020204" pitchFamily="34" charset="0"/>
+                <a:cs typeface="Arial" panose="020B0604020202020204" pitchFamily="34" charset="0"/>
+              </a:rPr>
+              <a:t>Income in academia is limited.</a:t>
+            </a:r>
+          </a:p>
+          <a:p>
+            <a:r>
+              <a:rPr lang="en-US" sz="3200" dirty="0">
+                <a:latin typeface="Arial" panose="020B0604020202020204" pitchFamily="34" charset="0"/>
+                <a:cs typeface="Arial" panose="020B0604020202020204" pitchFamily="34" charset="0"/>
+              </a:rPr>
+              <a:t>Working in academia offers lots of opportunities, focusing on the important once is a challenge. (both for mental health and for career)</a:t>
+            </a:r>
+          </a:p>
+        </p:txBody>
+      </p:sp>
+      <p:sp>
+        <p:nvSpPr>
+          <p:cNvPr id="13" name="Title 1">
+            <a:extLst>
+              <a:ext uri="{FF2B5EF4-FFF2-40B4-BE49-F238E27FC236}">
+                <a16:creationId xmlns:a16="http://schemas.microsoft.com/office/drawing/2014/main" id="{0558C11D-762A-AC96-58EA-A7BF0B1BB94F}"/>
+              </a:ext>
+            </a:extLst>
+          </p:cNvPr>
+          <p:cNvSpPr>
+            <a:spLocks noGrp="1"/>
+          </p:cNvSpPr>
+          <p:nvPr>
+            <p:ph type="title"/>
+          </p:nvPr>
+        </p:nvSpPr>
+        <p:spPr>
+          <a:xfrm>
+            <a:off x="271662" y="267785"/>
+            <a:ext cx="11686776" cy="1579148"/>
+          </a:xfrm>
+        </p:spPr>
+        <p:txBody>
+          <a:bodyPr vert="horz" lIns="91440" tIns="45720" rIns="91440" bIns="45720" rtlCol="0" anchor="t">
+            <a:normAutofit/>
+          </a:bodyPr>
+          <a:lstStyle/>
+          <a:p>
+            <a:r>
+              <a:rPr lang="en-US" sz="6000" kern="1200" dirty="0">
+                <a:latin typeface="Arial" panose="020B0604020202020204" pitchFamily="34" charset="0"/>
+                <a:cs typeface="Arial" panose="020B0604020202020204" pitchFamily="34" charset="0"/>
+              </a:rPr>
+              <a:t>What has been a challenge</a:t>
+            </a:r>
+          </a:p>
+        </p:txBody>
+      </p:sp>
+    </p:spTree>
+    <p:extLst>
+      <p:ext uri="{BB962C8B-B14F-4D97-AF65-F5344CB8AC3E}">
+        <p14:creationId xmlns:p14="http://schemas.microsoft.com/office/powerpoint/2010/main" val="1860155385"/>
+      </p:ext>
+    </p:extLst>
+  </p:cSld>
+  <p:clrMapOvr>
+    <a:masterClrMapping/>
+  </p:clrMapOvr>
+</p:sld>
+</file>
+
+<file path=ppt/slides/slide11.xml><?xml version="1.0" encoding="utf-8"?>
 <p:sld xmlns:a="http://schemas.openxmlformats.org/drawingml/2006/main" xmlns:r="http://schemas.openxmlformats.org/officeDocument/2006/relationships" xmlns:p="http://schemas.openxmlformats.org/presentationml/2006/main">
   <p:cSld>
     <p:bg>
@@ -5476,7 +5770,7 @@
                 <a:latin typeface="Arial" panose="020B0604020202020204" pitchFamily="34" charset="0"/>
                 <a:cs typeface="Arial" panose="020B0604020202020204" pitchFamily="34" charset="0"/>
               </a:rPr>
-              <a:t>Education</a:t>
+              <a:t>Big Picture – I will talk about HPC</a:t>
             </a:r>
           </a:p>
         </p:txBody>
@@ -5505,7 +5799,7 @@
         </p:spPr>
         <p:txBody>
           <a:bodyPr>
-            <a:normAutofit/>
+            <a:normAutofit lnSpcReduction="10000"/>
           </a:bodyPr>
           <a:lstStyle/>
           <a:p>
@@ -5514,27 +5808,25 @@
                 <a:latin typeface="Arial" panose="020B0604020202020204" pitchFamily="34" charset="0"/>
                 <a:cs typeface="Arial" panose="020B0604020202020204" pitchFamily="34" charset="0"/>
               </a:rPr>
-              <a:t>Master of Computer Science from Dresden University, Germany</a:t>
-            </a:r>
-          </a:p>
-          <a:p>
-            <a:pPr lvl="1"/>
-            <a:r>
-              <a:rPr lang="en-US" sz="3200" dirty="0">
+              <a:t>One of the few in HPC that actually has a full HPC education, plus a strong interest in “computers”.</a:t>
+            </a:r>
+          </a:p>
+          <a:p>
+            <a:r>
+              <a:rPr lang="en-US" sz="3600" dirty="0">
                 <a:latin typeface="Arial" panose="020B0604020202020204" pitchFamily="34" charset="0"/>
                 <a:cs typeface="Arial" panose="020B0604020202020204" pitchFamily="34" charset="0"/>
               </a:rPr>
-              <a:t>Major: High Performance Computing</a:t>
-            </a:r>
-          </a:p>
-          <a:p>
-            <a:pPr lvl="1"/>
-            <a:r>
-              <a:rPr lang="en-US" sz="3200" dirty="0">
+              <a:t>A deep understanding of computer architecture is super useful! Both hardware and software.</a:t>
+            </a:r>
+          </a:p>
+          <a:p>
+            <a:r>
+              <a:rPr lang="en-US" sz="3600" dirty="0">
                 <a:latin typeface="Arial" panose="020B0604020202020204" pitchFamily="34" charset="0"/>
                 <a:cs typeface="Arial" panose="020B0604020202020204" pitchFamily="34" charset="0"/>
               </a:rPr>
-              <a:t>A lot of jobs in parallel, first at the university, then at companies.</a:t>
+              <a:t>HPC used to be and still is cutting edge! Especially in academia! This is exciting and frightening.</a:t>
             </a:r>
           </a:p>
           <a:p>
@@ -5549,16 +5841,7 @@
                 <a:latin typeface="Arial" panose="020B0604020202020204" pitchFamily="34" charset="0"/>
                 <a:cs typeface="Arial" panose="020B0604020202020204" pitchFamily="34" charset="0"/>
               </a:rPr>
-              <a:t>1 year of PhD program at Max Planck – MPI-CBG</a:t>
-            </a:r>
-          </a:p>
-          <a:p>
-            <a:r>
-              <a:rPr lang="en-US" sz="3600" dirty="0">
-                <a:latin typeface="Arial" panose="020B0604020202020204" pitchFamily="34" charset="0"/>
-                <a:cs typeface="Arial" panose="020B0604020202020204" pitchFamily="34" charset="0"/>
-              </a:rPr>
-              <a:t>2 years of PhD program at IU</a:t>
+              <a:t>Hot Take: AI will advance science, transform a lot of jobs and I am fully on board with this!</a:t>
             </a:r>
           </a:p>
           <a:p>
@@ -5583,6 +5866,166 @@
 </file>
 
 <file path=ppt/slides/slide4.xml><?xml version="1.0" encoding="utf-8"?>
+<p:sld xmlns:a="http://schemas.openxmlformats.org/drawingml/2006/main" xmlns:r="http://schemas.openxmlformats.org/officeDocument/2006/relationships" xmlns:p="http://schemas.openxmlformats.org/presentationml/2006/main">
+  <p:cSld>
+    <p:bg>
+      <p:bgPr>
+        <a:solidFill>
+          <a:schemeClr val="bg1"/>
+        </a:solidFill>
+        <a:effectLst/>
+      </p:bgPr>
+    </p:bg>
+    <p:spTree>
+      <p:nvGrpSpPr>
+        <p:cNvPr id="1" name="">
+          <a:extLst>
+            <a:ext uri="{FF2B5EF4-FFF2-40B4-BE49-F238E27FC236}">
+              <a16:creationId xmlns:a16="http://schemas.microsoft.com/office/drawing/2014/main" id="{AD82F715-2A03-76F4-D8F3-C7E418DFA858}"/>
+            </a:ext>
+          </a:extLst>
+        </p:cNvPr>
+        <p:cNvGrpSpPr/>
+        <p:nvPr/>
+      </p:nvGrpSpPr>
+      <p:grpSpPr>
+        <a:xfrm>
+          <a:off x="0" y="0"/>
+          <a:ext cx="0" cy="0"/>
+          <a:chOff x="0" y="0"/>
+          <a:chExt cx="0" cy="0"/>
+        </a:xfrm>
+      </p:grpSpPr>
+      <p:sp>
+        <p:nvSpPr>
+          <p:cNvPr id="2" name="Title 1">
+            <a:extLst>
+              <a:ext uri="{FF2B5EF4-FFF2-40B4-BE49-F238E27FC236}">
+                <a16:creationId xmlns:a16="http://schemas.microsoft.com/office/drawing/2014/main" id="{88DD8A3D-AEAB-6A88-0A73-5F84D732B4CE}"/>
+              </a:ext>
+            </a:extLst>
+          </p:cNvPr>
+          <p:cNvSpPr>
+            <a:spLocks noGrp="1"/>
+          </p:cNvSpPr>
+          <p:nvPr>
+            <p:ph type="title"/>
+          </p:nvPr>
+        </p:nvSpPr>
+        <p:spPr>
+          <a:xfrm>
+            <a:off x="271662" y="267785"/>
+            <a:ext cx="11686776" cy="1579148"/>
+          </a:xfrm>
+        </p:spPr>
+        <p:txBody>
+          <a:bodyPr vert="horz" lIns="91440" tIns="45720" rIns="91440" bIns="45720" rtlCol="0" anchor="t">
+            <a:normAutofit/>
+          </a:bodyPr>
+          <a:lstStyle/>
+          <a:p>
+            <a:r>
+              <a:rPr lang="en-US" sz="6000" kern="1200" dirty="0">
+                <a:latin typeface="Arial" panose="020B0604020202020204" pitchFamily="34" charset="0"/>
+                <a:cs typeface="Arial" panose="020B0604020202020204" pitchFamily="34" charset="0"/>
+              </a:rPr>
+              <a:t>Education</a:t>
+            </a:r>
+          </a:p>
+        </p:txBody>
+      </p:sp>
+      <p:sp>
+        <p:nvSpPr>
+          <p:cNvPr id="3" name="Content Placeholder 2">
+            <a:extLst>
+              <a:ext uri="{FF2B5EF4-FFF2-40B4-BE49-F238E27FC236}">
+                <a16:creationId xmlns:a16="http://schemas.microsoft.com/office/drawing/2014/main" id="{AECF7A74-727D-8AAD-4A0C-BF1B423AC6EB}"/>
+              </a:ext>
+            </a:extLst>
+          </p:cNvPr>
+          <p:cNvSpPr>
+            <a:spLocks noGrp="1"/>
+          </p:cNvSpPr>
+          <p:nvPr>
+            <p:ph idx="1"/>
+          </p:nvPr>
+        </p:nvSpPr>
+        <p:spPr>
+          <a:xfrm>
+            <a:off x="951872" y="1543883"/>
+            <a:ext cx="10842964" cy="4867934"/>
+          </a:xfrm>
+        </p:spPr>
+        <p:txBody>
+          <a:bodyPr>
+            <a:normAutofit/>
+          </a:bodyPr>
+          <a:lstStyle/>
+          <a:p>
+            <a:r>
+              <a:rPr lang="en-US" sz="3600" dirty="0">
+                <a:latin typeface="Arial" panose="020B0604020202020204" pitchFamily="34" charset="0"/>
+                <a:cs typeface="Arial" panose="020B0604020202020204" pitchFamily="34" charset="0"/>
+              </a:rPr>
+              <a:t>Master of Computer Science from Dresden University, Germany (2006)</a:t>
+            </a:r>
+          </a:p>
+          <a:p>
+            <a:pPr lvl="1"/>
+            <a:r>
+              <a:rPr lang="en-US" sz="3200" dirty="0">
+                <a:latin typeface="Arial" panose="020B0604020202020204" pitchFamily="34" charset="0"/>
+                <a:cs typeface="Arial" panose="020B0604020202020204" pitchFamily="34" charset="0"/>
+              </a:rPr>
+              <a:t>Major: High Performance Computing</a:t>
+            </a:r>
+          </a:p>
+          <a:p>
+            <a:endParaRPr lang="en-US" sz="3600" dirty="0">
+              <a:latin typeface="Arial" panose="020B0604020202020204" pitchFamily="34" charset="0"/>
+              <a:cs typeface="Arial" panose="020B0604020202020204" pitchFamily="34" charset="0"/>
+            </a:endParaRPr>
+          </a:p>
+          <a:p>
+            <a:r>
+              <a:rPr lang="en-US" sz="3600" dirty="0">
+                <a:latin typeface="Arial" panose="020B0604020202020204" pitchFamily="34" charset="0"/>
+                <a:cs typeface="Arial" panose="020B0604020202020204" pitchFamily="34" charset="0"/>
+              </a:rPr>
+              <a:t>1 year of PhD program at Max Planck (2007)</a:t>
+            </a:r>
+          </a:p>
+          <a:p>
+            <a:r>
+              <a:rPr lang="en-US" sz="3600" dirty="0">
+                <a:latin typeface="Arial" panose="020B0604020202020204" pitchFamily="34" charset="0"/>
+                <a:cs typeface="Arial" panose="020B0604020202020204" pitchFamily="34" charset="0"/>
+              </a:rPr>
+              <a:t>2 years of PhD program at IU (2010-2012)</a:t>
+            </a:r>
+          </a:p>
+          <a:p>
+            <a:endParaRPr lang="en-US" sz="3600" dirty="0">
+              <a:latin typeface="Arial" panose="020B0604020202020204" pitchFamily="34" charset="0"/>
+              <a:cs typeface="Arial" panose="020B0604020202020204" pitchFamily="34" charset="0"/>
+            </a:endParaRPr>
+          </a:p>
+        </p:txBody>
+      </p:sp>
+    </p:spTree>
+    <p:extLst>
+      <p:ext uri="{BB962C8B-B14F-4D97-AF65-F5344CB8AC3E}">
+        <p14:creationId xmlns:p14="http://schemas.microsoft.com/office/powerpoint/2010/main" val="3854947945"/>
+      </p:ext>
+    </p:extLst>
+  </p:cSld>
+  <p:clrMapOvr>
+    <a:masterClrMapping/>
+  </p:clrMapOvr>
+</p:sld>
+</file>
+
+<file path=ppt/slides/slide5.xml><?xml version="1.0" encoding="utf-8"?>
 <p:sld xmlns:a="http://schemas.openxmlformats.org/drawingml/2006/main" xmlns:r="http://schemas.openxmlformats.org/officeDocument/2006/relationships" xmlns:p="http://schemas.openxmlformats.org/presentationml/2006/main">
   <p:cSld>
     <p:bg>
@@ -5792,7 +6235,7 @@
 </p:sld>
 </file>
 
-<file path=ppt/slides/slide5.xml><?xml version="1.0" encoding="utf-8"?>
+<file path=ppt/slides/slide6.xml><?xml version="1.0" encoding="utf-8"?>
 <p:sld xmlns:a="http://schemas.openxmlformats.org/drawingml/2006/main" xmlns:r="http://schemas.openxmlformats.org/officeDocument/2006/relationships" xmlns:p="http://schemas.openxmlformats.org/presentationml/2006/main">
   <p:cSld>
     <p:bg>
@@ -5975,7 +6418,7 @@
 </p:sld>
 </file>
 
-<file path=ppt/slides/slide6.xml><?xml version="1.0" encoding="utf-8"?>
+<file path=ppt/slides/slide7.xml><?xml version="1.0" encoding="utf-8"?>
 <p:sld xmlns:a="http://schemas.openxmlformats.org/drawingml/2006/main" xmlns:r="http://schemas.openxmlformats.org/officeDocument/2006/relationships" xmlns:p="http://schemas.openxmlformats.org/presentationml/2006/main">
   <p:cSld>
     <p:bg>
@@ -6128,7 +6571,7 @@
 </p:sld>
 </file>
 
-<file path=ppt/slides/slide7.xml><?xml version="1.0" encoding="utf-8"?>
+<file path=ppt/slides/slide8.xml><?xml version="1.0" encoding="utf-8"?>
 <p:sld xmlns:a="http://schemas.openxmlformats.org/drawingml/2006/main" xmlns:r="http://schemas.openxmlformats.org/officeDocument/2006/relationships" xmlns:p="http://schemas.openxmlformats.org/presentationml/2006/main">
   <p:cSld>
     <p:bg>
@@ -6301,7 +6744,7 @@
 </p:sld>
 </file>
 
-<file path=ppt/slides/slide8.xml><?xml version="1.0" encoding="utf-8"?>
+<file path=ppt/slides/slide9.xml><?xml version="1.0" encoding="utf-8"?>
 <p:sld xmlns:a="http://schemas.openxmlformats.org/drawingml/2006/main" xmlns:r="http://schemas.openxmlformats.org/officeDocument/2006/relationships" xmlns:p="http://schemas.openxmlformats.org/presentationml/2006/main">
   <p:cSld>
     <p:bg>
@@ -6365,6 +6808,15 @@
                 <a:latin typeface="Arial" panose="020B0604020202020204" pitchFamily="34" charset="0"/>
                 <a:cs typeface="Arial" panose="020B0604020202020204" pitchFamily="34" charset="0"/>
               </a:rPr>
+              <a:t>I love my job, and for me this is hugely important.</a:t>
+            </a:r>
+          </a:p>
+          <a:p>
+            <a:r>
+              <a:rPr lang="en-US" sz="3200" dirty="0">
+                <a:latin typeface="Arial" panose="020B0604020202020204" pitchFamily="34" charset="0"/>
+                <a:cs typeface="Arial" panose="020B0604020202020204" pitchFamily="34" charset="0"/>
+              </a:rPr>
               <a:t>I work in the field I was trained in.</a:t>
             </a:r>
           </a:p>
@@ -6466,154 +6918,6 @@
     <p:extLst>
       <p:ext uri="{BB962C8B-B14F-4D97-AF65-F5344CB8AC3E}">
         <p14:creationId xmlns:p14="http://schemas.microsoft.com/office/powerpoint/2010/main" val="3177790572"/>
-      </p:ext>
-    </p:extLst>
-  </p:cSld>
-  <p:clrMapOvr>
-    <a:masterClrMapping/>
-  </p:clrMapOvr>
-</p:sld>
-</file>
-
-<file path=ppt/slides/slide9.xml><?xml version="1.0" encoding="utf-8"?>
-<p:sld xmlns:a="http://schemas.openxmlformats.org/drawingml/2006/main" xmlns:r="http://schemas.openxmlformats.org/officeDocument/2006/relationships" xmlns:p="http://schemas.openxmlformats.org/presentationml/2006/main">
-  <p:cSld>
-    <p:bg>
-      <p:bgPr>
-        <a:solidFill>
-          <a:schemeClr val="bg1"/>
-        </a:solidFill>
-        <a:effectLst/>
-      </p:bgPr>
-    </p:bg>
-    <p:spTree>
-      <p:nvGrpSpPr>
-        <p:cNvPr id="1" name="">
-          <a:extLst>
-            <a:ext uri="{FF2B5EF4-FFF2-40B4-BE49-F238E27FC236}">
-              <a16:creationId xmlns:a16="http://schemas.microsoft.com/office/drawing/2014/main" id="{0FB80583-B17F-60EF-99CC-296C8448B765}"/>
-            </a:ext>
-          </a:extLst>
-        </p:cNvPr>
-        <p:cNvGrpSpPr/>
-        <p:nvPr/>
-      </p:nvGrpSpPr>
-      <p:grpSpPr>
-        <a:xfrm>
-          <a:off x="0" y="0"/>
-          <a:ext cx="0" cy="0"/>
-          <a:chOff x="0" y="0"/>
-          <a:chExt cx="0" cy="0"/>
-        </a:xfrm>
-      </p:grpSpPr>
-      <p:sp>
-        <p:nvSpPr>
-          <p:cNvPr id="3" name="Content Placeholder 2">
-            <a:extLst>
-              <a:ext uri="{FF2B5EF4-FFF2-40B4-BE49-F238E27FC236}">
-                <a16:creationId xmlns:a16="http://schemas.microsoft.com/office/drawing/2014/main" id="{91F68BB5-38F8-1B70-F687-A9A5CCAE13AB}"/>
-              </a:ext>
-            </a:extLst>
-          </p:cNvPr>
-          <p:cNvSpPr>
-            <a:spLocks noGrp="1"/>
-          </p:cNvSpPr>
-          <p:nvPr>
-            <p:ph idx="1"/>
-          </p:nvPr>
-        </p:nvSpPr>
-        <p:spPr>
-          <a:xfrm>
-            <a:off x="951872" y="1543883"/>
-            <a:ext cx="10842964" cy="4867934"/>
-          </a:xfrm>
-        </p:spPr>
-        <p:txBody>
-          <a:bodyPr>
-            <a:noAutofit/>
-          </a:bodyPr>
-          <a:lstStyle/>
-          <a:p>
-            <a:r>
-              <a:rPr lang="en-US" sz="3200" dirty="0">
-                <a:latin typeface="Arial" panose="020B0604020202020204" pitchFamily="34" charset="0"/>
-                <a:cs typeface="Arial" panose="020B0604020202020204" pitchFamily="34" charset="0"/>
-              </a:rPr>
-              <a:t>I enjoy technical work much more than management.</a:t>
-            </a:r>
-          </a:p>
-          <a:p>
-            <a:pPr lvl="1"/>
-            <a:r>
-              <a:rPr lang="en-US" sz="2800" dirty="0">
-                <a:latin typeface="Arial" panose="020B0604020202020204" pitchFamily="34" charset="0"/>
-                <a:cs typeface="Arial" panose="020B0604020202020204" pitchFamily="34" charset="0"/>
-              </a:rPr>
-              <a:t>Large companies have dual career tracks, not so sure about universities.</a:t>
-            </a:r>
-          </a:p>
-          <a:p>
-            <a:r>
-              <a:rPr lang="en-US" sz="3200" dirty="0">
-                <a:latin typeface="Arial" panose="020B0604020202020204" pitchFamily="34" charset="0"/>
-                <a:cs typeface="Arial" panose="020B0604020202020204" pitchFamily="34" charset="0"/>
-              </a:rPr>
-              <a:t>Income in academia is limited.</a:t>
-            </a:r>
-          </a:p>
-          <a:p>
-            <a:r>
-              <a:rPr lang="en-US" sz="3200" dirty="0">
-                <a:latin typeface="Arial" panose="020B0604020202020204" pitchFamily="34" charset="0"/>
-                <a:cs typeface="Arial" panose="020B0604020202020204" pitchFamily="34" charset="0"/>
-              </a:rPr>
-              <a:t>Working in academia offers lots of opportunities, focusing on the important once is a challenge. (both for mental health and for career)</a:t>
-            </a:r>
-          </a:p>
-        </p:txBody>
-      </p:sp>
-      <p:sp>
-        <p:nvSpPr>
-          <p:cNvPr id="13" name="Title 1">
-            <a:extLst>
-              <a:ext uri="{FF2B5EF4-FFF2-40B4-BE49-F238E27FC236}">
-                <a16:creationId xmlns:a16="http://schemas.microsoft.com/office/drawing/2014/main" id="{0558C11D-762A-AC96-58EA-A7BF0B1BB94F}"/>
-              </a:ext>
-            </a:extLst>
-          </p:cNvPr>
-          <p:cNvSpPr>
-            <a:spLocks noGrp="1"/>
-          </p:cNvSpPr>
-          <p:nvPr>
-            <p:ph type="title"/>
-          </p:nvPr>
-        </p:nvSpPr>
-        <p:spPr>
-          <a:xfrm>
-            <a:off x="271662" y="267785"/>
-            <a:ext cx="11686776" cy="1579148"/>
-          </a:xfrm>
-        </p:spPr>
-        <p:txBody>
-          <a:bodyPr vert="horz" lIns="91440" tIns="45720" rIns="91440" bIns="45720" rtlCol="0" anchor="t">
-            <a:normAutofit/>
-          </a:bodyPr>
-          <a:lstStyle/>
-          <a:p>
-            <a:r>
-              <a:rPr lang="en-US" sz="6000" kern="1200" dirty="0">
-                <a:latin typeface="Arial" panose="020B0604020202020204" pitchFamily="34" charset="0"/>
-                <a:cs typeface="Arial" panose="020B0604020202020204" pitchFamily="34" charset="0"/>
-              </a:rPr>
-              <a:t>What has been a challenge</a:t>
-            </a:r>
-          </a:p>
-        </p:txBody>
-      </p:sp>
-    </p:spTree>
-    <p:extLst>
-      <p:ext uri="{BB962C8B-B14F-4D97-AF65-F5344CB8AC3E}">
-        <p14:creationId xmlns:p14="http://schemas.microsoft.com/office/powerpoint/2010/main" val="1860155385"/>
       </p:ext>
     </p:extLst>
   </p:cSld>

--- a/CareerSpotlights/RobertHenschel.pptx
+++ b/CareerSpotlights/RobertHenschel.pptx
@@ -5020,7 +5020,7 @@
         </p:nvSpPr>
         <p:spPr>
           <a:xfrm>
-            <a:off x="501226" y="2261770"/>
+            <a:off x="501226" y="1877303"/>
             <a:ext cx="4703820" cy="2940132"/>
           </a:xfrm>
         </p:spPr>
@@ -5032,7 +5032,7 @@
           <a:p>
             <a:pPr algn="l"/>
             <a:r>
-              <a:rPr lang="en-US" sz="2800" dirty="0"/>
+              <a:rPr lang="en-US" sz="3600" dirty="0"/>
               <a:t>Robert Henschel</a:t>
             </a:r>
             <a:br>
@@ -5128,7 +5128,7 @@
         </p:blipFill>
         <p:spPr bwMode="auto">
           <a:xfrm>
-            <a:off x="1146396" y="4848674"/>
+            <a:off x="1146396" y="4495380"/>
             <a:ext cx="416894" cy="361335"/>
           </a:xfrm>
           <a:prstGeom prst="rect">
@@ -5175,7 +5175,7 @@
         </p:blipFill>
         <p:spPr bwMode="auto">
           <a:xfrm>
-            <a:off x="469450" y="4697029"/>
+            <a:off x="469450" y="4343735"/>
             <a:ext cx="645170" cy="645170"/>
           </a:xfrm>
           <a:prstGeom prst="rect">
@@ -5215,7 +5215,7 @@
         </p:blipFill>
         <p:spPr>
           <a:xfrm>
-            <a:off x="1711420" y="4848674"/>
+            <a:off x="1711420" y="4495380"/>
             <a:ext cx="398509" cy="361335"/>
           </a:xfrm>
           <a:prstGeom prst="rect">
@@ -5275,8 +5275,38 @@
         </p:blipFill>
         <p:spPr>
           <a:xfrm>
-            <a:off x="2258060" y="4839278"/>
+            <a:off x="2258060" y="4485984"/>
             <a:ext cx="398509" cy="398509"/>
+          </a:xfrm>
+          <a:prstGeom prst="rect">
+            <a:avLst/>
+          </a:prstGeom>
+        </p:spPr>
+      </p:pic>
+      <p:pic>
+        <p:nvPicPr>
+          <p:cNvPr id="10" name="Picture 9">
+            <a:extLst>
+              <a:ext uri="{FF2B5EF4-FFF2-40B4-BE49-F238E27FC236}">
+                <a16:creationId xmlns:a16="http://schemas.microsoft.com/office/drawing/2014/main" id="{D1CBE4C1-D828-6ECE-F6F4-F86E1AEFD345}"/>
+              </a:ext>
+            </a:extLst>
+          </p:cNvPr>
+          <p:cNvPicPr>
+            <a:picLocks noChangeAspect="1"/>
+          </p:cNvPicPr>
+          <p:nvPr/>
+        </p:nvPicPr>
+        <p:blipFill>
+          <a:blip r:embed="rId9"/>
+          <a:stretch>
+            <a:fillRect/>
+          </a:stretch>
+        </p:blipFill>
+        <p:spPr>
+          <a:xfrm>
+            <a:off x="549781" y="5077274"/>
+            <a:ext cx="1610123" cy="1610123"/>
           </a:xfrm>
           <a:prstGeom prst="rect">
             <a:avLst/>
@@ -5389,6 +5419,16 @@
                 <a:cs typeface="Arial" panose="020B0604020202020204" pitchFamily="34" charset="0"/>
               </a:rPr>
               <a:t>Working in academia offers lots of opportunities, focusing on the important once is a challenge. (both for mental health and for career)</a:t>
+            </a:r>
+          </a:p>
+          <a:p>
+            <a:pPr lvl="1"/>
+            <a:r>
+              <a:rPr lang="en-US" sz="2800" dirty="0">
+                <a:latin typeface="Arial" panose="020B0604020202020204" pitchFamily="34" charset="0"/>
+                <a:cs typeface="Arial" panose="020B0604020202020204" pitchFamily="34" charset="0"/>
+              </a:rPr>
+              <a:t>And AI makes it works. </a:t>
             </a:r>
           </a:p>
         </p:txBody>
@@ -5799,12 +5839,12 @@
         </p:spPr>
         <p:txBody>
           <a:bodyPr>
-            <a:normAutofit lnSpcReduction="10000"/>
+            <a:normAutofit fontScale="92500"/>
           </a:bodyPr>
           <a:lstStyle/>
           <a:p>
             <a:r>
-              <a:rPr lang="en-US" sz="3600" dirty="0">
+              <a:rPr lang="en-US" sz="3200" dirty="0">
                 <a:latin typeface="Arial" panose="020B0604020202020204" pitchFamily="34" charset="0"/>
                 <a:cs typeface="Arial" panose="020B0604020202020204" pitchFamily="34" charset="0"/>
               </a:rPr>
@@ -5813,7 +5853,7 @@
           </a:p>
           <a:p>
             <a:r>
-              <a:rPr lang="en-US" sz="3600" dirty="0">
+              <a:rPr lang="en-US" sz="3200" dirty="0">
                 <a:latin typeface="Arial" panose="020B0604020202020204" pitchFamily="34" charset="0"/>
                 <a:cs typeface="Arial" panose="020B0604020202020204" pitchFamily="34" charset="0"/>
               </a:rPr>
@@ -5822,7 +5862,7 @@
           </a:p>
           <a:p>
             <a:r>
-              <a:rPr lang="en-US" sz="3600" dirty="0">
+              <a:rPr lang="en-US" sz="3200" dirty="0">
                 <a:latin typeface="Arial" panose="020B0604020202020204" pitchFamily="34" charset="0"/>
                 <a:cs typeface="Arial" panose="020B0604020202020204" pitchFamily="34" charset="0"/>
               </a:rPr>
@@ -5830,14 +5870,23 @@
             </a:r>
           </a:p>
           <a:p>
-            <a:endParaRPr lang="en-US" sz="3600" dirty="0">
+            <a:r>
+              <a:rPr lang="en-US" sz="3200" dirty="0">
+                <a:latin typeface="Arial" panose="020B0604020202020204" pitchFamily="34" charset="0"/>
+                <a:cs typeface="Arial" panose="020B0604020202020204" pitchFamily="34" charset="0"/>
+              </a:rPr>
+              <a:t>Having done research yourself, helps understand HPC users!</a:t>
+            </a:r>
+          </a:p>
+          <a:p>
+            <a:endParaRPr lang="en-US" sz="3200" dirty="0">
               <a:latin typeface="Arial" panose="020B0604020202020204" pitchFamily="34" charset="0"/>
               <a:cs typeface="Arial" panose="020B0604020202020204" pitchFamily="34" charset="0"/>
             </a:endParaRPr>
           </a:p>
           <a:p>
             <a:r>
-              <a:rPr lang="en-US" sz="3600" dirty="0">
+              <a:rPr lang="en-US" sz="3200" dirty="0">
                 <a:latin typeface="Arial" panose="020B0604020202020204" pitchFamily="34" charset="0"/>
                 <a:cs typeface="Arial" panose="020B0604020202020204" pitchFamily="34" charset="0"/>
               </a:rPr>
@@ -5845,7 +5894,7 @@
             </a:r>
           </a:p>
           <a:p>
-            <a:endParaRPr lang="en-US" sz="3600" dirty="0">
+            <a:endParaRPr lang="en-US" sz="3200" dirty="0">
               <a:latin typeface="Arial" panose="020B0604020202020204" pitchFamily="34" charset="0"/>
               <a:cs typeface="Arial" panose="020B0604020202020204" pitchFamily="34" charset="0"/>
             </a:endParaRPr>
@@ -6808,7 +6857,21 @@
                 <a:latin typeface="Arial" panose="020B0604020202020204" pitchFamily="34" charset="0"/>
                 <a:cs typeface="Arial" panose="020B0604020202020204" pitchFamily="34" charset="0"/>
               </a:rPr>
-              <a:t>I love my job, and for me this is hugely important.</a:t>
+              <a:t>I love my job, and </a:t>
+            </a:r>
+            <a:r>
+              <a:rPr lang="en-US" sz="3200">
+                <a:latin typeface="Arial" panose="020B0604020202020204" pitchFamily="34" charset="0"/>
+                <a:cs typeface="Arial" panose="020B0604020202020204" pitchFamily="34" charset="0"/>
+              </a:rPr>
+              <a:t>for me, </a:t>
+            </a:r>
+            <a:r>
+              <a:rPr lang="en-US" sz="3200" dirty="0">
+                <a:latin typeface="Arial" panose="020B0604020202020204" pitchFamily="34" charset="0"/>
+                <a:cs typeface="Arial" panose="020B0604020202020204" pitchFamily="34" charset="0"/>
+              </a:rPr>
+              <a:t>this is hugely important.</a:t>
             </a:r>
           </a:p>
           <a:p>
